--- a/slides/AI in Journalism-2.pptx
+++ b/slides/AI in Journalism-2.pptx
@@ -227,7 +227,7 @@
           <a:p>
             <a:fld id="{D584BE07-979B-4FA0-9B38-E292101A23E7}" type="datetimeFigureOut">
               <a:rPr lang="fa-IR" smtClean="0"/>
-              <a:t>08/04/1447</a:t>
+              <a:t>26/04/1447</a:t>
             </a:fld>
             <a:endParaRPr lang="fa-IR"/>
           </a:p>
@@ -5567,43 +5567,8 @@
                   <a:srgbClr val="164193"/>
                 </a:solidFill>
               </a:rPr>
-              <a:t>جلسه اول: مقدمه‌ای بر هوش مصنوعی و تحولات آن در </a:t>
-            </a:r>
-            <a:r>
-              <a:rPr lang="fa-IR" sz="5400" dirty="0" err="1">
-                <a:solidFill>
-                  <a:srgbClr val="164193"/>
-                </a:solidFill>
-              </a:rPr>
-              <a:t>روزنامه‌نگاری</a:t>
-            </a:r>
-            <a:br>
-              <a:rPr lang="fa-IR" sz="5400" dirty="0">
-                <a:solidFill>
-                  <a:srgbClr val="164193"/>
-                </a:solidFill>
-              </a:rPr>
-            </a:br>
-            <a:br>
-              <a:rPr lang="fa-IR" sz="5400" dirty="0">
-                <a:solidFill>
-                  <a:srgbClr val="164193"/>
-                </a:solidFill>
-              </a:rPr>
-            </a:br>
-            <a:r>
-              <a:rPr lang="fa-IR" sz="4400" dirty="0">
-                <a:solidFill>
-                  <a:srgbClr val="164193"/>
-                </a:solidFill>
-              </a:rPr>
-              <a:t>(جلسه دوم)</a:t>
-            </a:r>
-            <a:endParaRPr lang="fa-IR" sz="5400" dirty="0">
-              <a:solidFill>
-                <a:srgbClr val="164193"/>
-              </a:solidFill>
-            </a:endParaRPr>
+              <a:t>جلسه دوم: هوش مصنوعی در جمع‌آوری و تحلیل اخبار</a:t>
+            </a:r>
           </a:p>
         </p:txBody>
       </p:sp>
